--- a/Analysis/Presentation-In-Class/Group-07-Prensentaiton-Visual-Biases.pptx
+++ b/Analysis/Presentation-In-Class/Group-07-Prensentaiton-Visual-Biases.pptx
@@ -7778,7 +7778,11 @@
             </a:br>
             <a:r>
               <a:rPr lang="en-US" b="1" dirty="0"/>
-              <a:t>Embarkment vs. Survival Rate</a:t>
+              <a:t>Data Biases </a:t>
+            </a:r>
+            <a:r>
+              <a:rPr lang="en-US" b="1"/>
+              <a:t>in Housing</a:t>
             </a:r>
             <a:endParaRPr lang="en-US" dirty="0"/>
           </a:p>

--- a/Analysis/Presentation-In-Class/Group-07-Prensentaiton-Visual-Biases.pptx
+++ b/Analysis/Presentation-In-Class/Group-07-Prensentaiton-Visual-Biases.pptx
@@ -7,7 +7,10 @@
   <p:sldIdLst>
     <p:sldId id="256" r:id="rId2"/>
     <p:sldId id="261" r:id="rId3"/>
-    <p:sldId id="263" r:id="rId4"/>
+    <p:sldId id="264" r:id="rId4"/>
+    <p:sldId id="266" r:id="rId5"/>
+    <p:sldId id="265" r:id="rId6"/>
+    <p:sldId id="263" r:id="rId7"/>
   </p:sldIdLst>
   <p:sldSz cx="12192000" cy="6858000"/>
   <p:notesSz cx="6858000" cy="9144000"/>
@@ -303,7 +306,7 @@
             <a:fld id="{B61BEF0D-F0BB-DE4B-95CE-6DB70DBA9567}" type="datetimeFigureOut">
               <a:rPr lang="en-US" dirty="0"/>
               <a:pPr/>
-              <a:t>3/19/25</a:t>
+              <a:t>3/20/25</a:t>
             </a:fld>
             <a:endParaRPr lang="en-US" dirty="0"/>
           </a:p>
@@ -638,7 +641,7 @@
             <a:fld id="{B61BEF0D-F0BB-DE4B-95CE-6DB70DBA9567}" type="datetimeFigureOut">
               <a:rPr lang="en-US" dirty="0"/>
               <a:pPr/>
-              <a:t>3/19/25</a:t>
+              <a:t>3/20/25</a:t>
             </a:fld>
             <a:endParaRPr lang="en-US" dirty="0"/>
           </a:p>
@@ -1036,7 +1039,7 @@
             <a:fld id="{B61BEF0D-F0BB-DE4B-95CE-6DB70DBA9567}" type="datetimeFigureOut">
               <a:rPr lang="en-US" dirty="0"/>
               <a:pPr/>
-              <a:t>3/19/25</a:t>
+              <a:t>3/20/25</a:t>
             </a:fld>
             <a:endParaRPr lang="en-US" dirty="0"/>
           </a:p>
@@ -1369,7 +1372,7 @@
             <a:fld id="{B61BEF0D-F0BB-DE4B-95CE-6DB70DBA9567}" type="datetimeFigureOut">
               <a:rPr lang="en-US" dirty="0"/>
               <a:pPr/>
-              <a:t>3/19/25</a:t>
+              <a:t>3/20/25</a:t>
             </a:fld>
             <a:endParaRPr lang="en-US" dirty="0"/>
           </a:p>
@@ -1686,7 +1689,7 @@
             <a:fld id="{B61BEF0D-F0BB-DE4B-95CE-6DB70DBA9567}" type="datetimeFigureOut">
               <a:rPr lang="en-US" dirty="0"/>
               <a:pPr/>
-              <a:t>3/19/25</a:t>
+              <a:t>3/20/25</a:t>
             </a:fld>
             <a:endParaRPr lang="en-US" dirty="0"/>
           </a:p>
@@ -2079,7 +2082,7 @@
             <a:fld id="{B61BEF0D-F0BB-DE4B-95CE-6DB70DBA9567}" type="datetimeFigureOut">
               <a:rPr lang="en-US" dirty="0"/>
               <a:pPr/>
-              <a:t>3/19/25</a:t>
+              <a:t>3/20/25</a:t>
             </a:fld>
             <a:endParaRPr lang="en-US" dirty="0"/>
           </a:p>
@@ -2333,7 +2336,7 @@
             <a:fld id="{B61BEF0D-F0BB-DE4B-95CE-6DB70DBA9567}" type="datetimeFigureOut">
               <a:rPr lang="en-US" dirty="0"/>
               <a:pPr/>
-              <a:t>3/19/25</a:t>
+              <a:t>3/20/25</a:t>
             </a:fld>
             <a:endParaRPr lang="en-US" dirty="0"/>
           </a:p>
@@ -2592,7 +2595,7 @@
             <a:fld id="{B61BEF0D-F0BB-DE4B-95CE-6DB70DBA9567}" type="datetimeFigureOut">
               <a:rPr lang="en-US" dirty="0"/>
               <a:pPr/>
-              <a:t>3/19/25</a:t>
+              <a:t>3/20/25</a:t>
             </a:fld>
             <a:endParaRPr lang="en-US" dirty="0"/>
           </a:p>
@@ -2851,7 +2854,7 @@
             <a:fld id="{B61BEF0D-F0BB-DE4B-95CE-6DB70DBA9567}" type="datetimeFigureOut">
               <a:rPr lang="en-US" dirty="0"/>
               <a:pPr/>
-              <a:t>3/19/25</a:t>
+              <a:t>3/20/25</a:t>
             </a:fld>
             <a:endParaRPr lang="en-US" dirty="0"/>
           </a:p>
@@ -3177,7 +3180,7 @@
             <a:fld id="{B61BEF0D-F0BB-DE4B-95CE-6DB70DBA9567}" type="datetimeFigureOut">
               <a:rPr lang="en-US" dirty="0"/>
               <a:pPr/>
-              <a:t>3/19/25</a:t>
+              <a:t>3/20/25</a:t>
             </a:fld>
             <a:endParaRPr lang="en-US" dirty="0"/>
           </a:p>
@@ -3497,7 +3500,7 @@
             <a:fld id="{B61BEF0D-F0BB-DE4B-95CE-6DB70DBA9567}" type="datetimeFigureOut">
               <a:rPr lang="en-US" dirty="0"/>
               <a:pPr/>
-              <a:t>3/19/25</a:t>
+              <a:t>3/20/25</a:t>
             </a:fld>
             <a:endParaRPr lang="en-US" dirty="0"/>
           </a:p>
@@ -3951,7 +3954,7 @@
             <a:fld id="{B61BEF0D-F0BB-DE4B-95CE-6DB70DBA9567}" type="datetimeFigureOut">
               <a:rPr lang="en-US" dirty="0"/>
               <a:pPr/>
-              <a:t>3/19/25</a:t>
+              <a:t>3/20/25</a:t>
             </a:fld>
             <a:endParaRPr lang="en-US" dirty="0"/>
           </a:p>
@@ -4153,7 +4156,7 @@
             <a:fld id="{B61BEF0D-F0BB-DE4B-95CE-6DB70DBA9567}" type="datetimeFigureOut">
               <a:rPr lang="en-US" dirty="0"/>
               <a:pPr/>
-              <a:t>3/19/25</a:t>
+              <a:t>3/20/25</a:t>
             </a:fld>
             <a:endParaRPr lang="en-US" dirty="0"/>
           </a:p>
@@ -4327,7 +4330,7 @@
             <a:fld id="{B61BEF0D-F0BB-DE4B-95CE-6DB70DBA9567}" type="datetimeFigureOut">
               <a:rPr lang="en-US" dirty="0"/>
               <a:pPr/>
-              <a:t>3/19/25</a:t>
+              <a:t>3/20/25</a:t>
             </a:fld>
             <a:endParaRPr lang="en-US" dirty="0"/>
           </a:p>
@@ -4657,7 +4660,7 @@
             <a:fld id="{B61BEF0D-F0BB-DE4B-95CE-6DB70DBA9567}" type="datetimeFigureOut">
               <a:rPr lang="en-US" dirty="0"/>
               <a:pPr/>
-              <a:t>3/19/25</a:t>
+              <a:t>3/20/25</a:t>
             </a:fld>
             <a:endParaRPr lang="en-US" dirty="0"/>
           </a:p>
@@ -4999,7 +5002,7 @@
             <a:fld id="{B61BEF0D-F0BB-DE4B-95CE-6DB70DBA9567}" type="datetimeFigureOut">
               <a:rPr lang="en-US" dirty="0"/>
               <a:pPr/>
-              <a:t>3/19/25</a:t>
+              <a:t>3/20/25</a:t>
             </a:fld>
             <a:endParaRPr lang="en-US" dirty="0"/>
           </a:p>
@@ -7113,7 +7116,7 @@
             <a:fld id="{B61BEF0D-F0BB-DE4B-95CE-6DB70DBA9567}" type="datetimeFigureOut">
               <a:rPr lang="en-US" dirty="0"/>
               <a:pPr/>
-              <a:t>3/19/25</a:t>
+              <a:t>3/20/25</a:t>
             </a:fld>
             <a:endParaRPr lang="en-US" dirty="0"/>
           </a:p>
@@ -7901,6 +7904,358 @@
           <p:cNvPr id="2" name="Title 1">
             <a:extLst>
               <a:ext uri="{FF2B5EF4-FFF2-40B4-BE49-F238E27FC236}">
+                <a16:creationId xmlns:a16="http://schemas.microsoft.com/office/drawing/2014/main" id="{2DEFE7A1-9C4A-7148-60A9-5E134EBDB997}"/>
+              </a:ext>
+            </a:extLst>
+          </p:cNvPr>
+          <p:cNvSpPr>
+            <a:spLocks noGrp="1"/>
+          </p:cNvSpPr>
+          <p:nvPr>
+            <p:ph type="title"/>
+          </p:nvPr>
+        </p:nvSpPr>
+        <p:spPr/>
+        <p:txBody>
+          <a:bodyPr/>
+          <a:lstStyle/>
+          <a:p>
+            <a:r>
+              <a:rPr lang="en-US" dirty="0"/>
+              <a:t>Methodology</a:t>
+            </a:r>
+            <a:br>
+              <a:rPr lang="en-US" dirty="0"/>
+            </a:br>
+            <a:r>
+              <a:rPr lang="en-US" b="1" dirty="0"/>
+              <a:t>Data Bias</a:t>
+            </a:r>
+          </a:p>
+        </p:txBody>
+      </p:sp>
+      <p:sp>
+        <p:nvSpPr>
+          <p:cNvPr id="4" name="Content Placeholder 3">
+            <a:extLst>
+              <a:ext uri="{FF2B5EF4-FFF2-40B4-BE49-F238E27FC236}">
+                <a16:creationId xmlns:a16="http://schemas.microsoft.com/office/drawing/2014/main" id="{4E77024C-D316-0246-6C03-EF7F04A33709}"/>
+              </a:ext>
+            </a:extLst>
+          </p:cNvPr>
+          <p:cNvSpPr>
+            <a:spLocks noGrp="1"/>
+          </p:cNvSpPr>
+          <p:nvPr>
+            <p:ph sz="half" idx="1"/>
+          </p:nvPr>
+        </p:nvSpPr>
+        <p:spPr/>
+        <p:txBody>
+          <a:bodyPr/>
+          <a:lstStyle/>
+          <a:p>
+            <a:endParaRPr lang="en-US"/>
+          </a:p>
+        </p:txBody>
+      </p:sp>
+      <p:sp>
+        <p:nvSpPr>
+          <p:cNvPr id="5" name="Content Placeholder 4">
+            <a:extLst>
+              <a:ext uri="{FF2B5EF4-FFF2-40B4-BE49-F238E27FC236}">
+                <a16:creationId xmlns:a16="http://schemas.microsoft.com/office/drawing/2014/main" id="{44C7B451-8471-0071-AB6A-191F0680A9DA}"/>
+              </a:ext>
+            </a:extLst>
+          </p:cNvPr>
+          <p:cNvSpPr>
+            <a:spLocks noGrp="1"/>
+          </p:cNvSpPr>
+          <p:nvPr>
+            <p:ph sz="half" idx="2"/>
+          </p:nvPr>
+        </p:nvSpPr>
+        <p:spPr/>
+        <p:txBody>
+          <a:bodyPr/>
+          <a:lstStyle/>
+          <a:p>
+            <a:r>
+              <a:rPr lang="en-US" dirty="0"/>
+              <a:t>Examined Historical Racial Covenants compared to Modern Property Values</a:t>
+            </a:r>
+          </a:p>
+          <a:p>
+            <a:r>
+              <a:rPr lang="en-US" dirty="0"/>
+              <a:t>Economic Indicators</a:t>
+            </a:r>
+          </a:p>
+          <a:p>
+            <a:r>
+              <a:rPr lang="en-US" dirty="0"/>
+              <a:t>Neighborhood Demographics</a:t>
+            </a:r>
+          </a:p>
+          <a:p>
+            <a:endParaRPr lang="en-US" dirty="0"/>
+          </a:p>
+        </p:txBody>
+      </p:sp>
+    </p:spTree>
+    <p:extLst>
+      <p:ext uri="{BB962C8B-B14F-4D97-AF65-F5344CB8AC3E}">
+        <p14:creationId xmlns:p14="http://schemas.microsoft.com/office/powerpoint/2010/main" val="1320788878"/>
+      </p:ext>
+    </p:extLst>
+  </p:cSld>
+  <p:clrMapOvr>
+    <a:masterClrMapping/>
+  </p:clrMapOvr>
+</p:sld>
+</file>
+
+<file path=ppt/slides/slide4.xml><?xml version="1.0" encoding="utf-8"?>
+<p:sld xmlns:a="http://schemas.openxmlformats.org/drawingml/2006/main" xmlns:r="http://schemas.openxmlformats.org/officeDocument/2006/relationships" xmlns:p="http://schemas.openxmlformats.org/presentationml/2006/main">
+  <p:cSld>
+    <p:spTree>
+      <p:nvGrpSpPr>
+        <p:cNvPr id="1" name="">
+          <a:extLst>
+            <a:ext uri="{FF2B5EF4-FFF2-40B4-BE49-F238E27FC236}">
+              <a16:creationId xmlns:a16="http://schemas.microsoft.com/office/drawing/2014/main" id="{5B996E07-AB83-2AA8-CCE4-FD13D8B716D2}"/>
+            </a:ext>
+          </a:extLst>
+        </p:cNvPr>
+        <p:cNvGrpSpPr/>
+        <p:nvPr/>
+      </p:nvGrpSpPr>
+      <p:grpSpPr>
+        <a:xfrm>
+          <a:off x="0" y="0"/>
+          <a:ext cx="0" cy="0"/>
+          <a:chOff x="0" y="0"/>
+          <a:chExt cx="0" cy="0"/>
+        </a:xfrm>
+      </p:grpSpPr>
+      <p:sp>
+        <p:nvSpPr>
+          <p:cNvPr id="2" name="Title 1">
+            <a:extLst>
+              <a:ext uri="{FF2B5EF4-FFF2-40B4-BE49-F238E27FC236}">
+                <a16:creationId xmlns:a16="http://schemas.microsoft.com/office/drawing/2014/main" id="{8892A9A0-5725-4912-CC3B-09021CB73340}"/>
+              </a:ext>
+            </a:extLst>
+          </p:cNvPr>
+          <p:cNvSpPr>
+            <a:spLocks noGrp="1"/>
+          </p:cNvSpPr>
+          <p:nvPr>
+            <p:ph type="title"/>
+          </p:nvPr>
+        </p:nvSpPr>
+        <p:spPr/>
+        <p:txBody>
+          <a:bodyPr/>
+          <a:lstStyle/>
+          <a:p>
+            <a:r>
+              <a:rPr lang="en-US" dirty="0"/>
+              <a:t>Methodology</a:t>
+            </a:r>
+            <a:br>
+              <a:rPr lang="en-US" dirty="0"/>
+            </a:br>
+            <a:r>
+              <a:rPr lang="en-US" b="1" dirty="0"/>
+              <a:t>Algorithmic Bias</a:t>
+            </a:r>
+          </a:p>
+        </p:txBody>
+      </p:sp>
+      <p:sp>
+        <p:nvSpPr>
+          <p:cNvPr id="4" name="Content Placeholder 3">
+            <a:extLst>
+              <a:ext uri="{FF2B5EF4-FFF2-40B4-BE49-F238E27FC236}">
+                <a16:creationId xmlns:a16="http://schemas.microsoft.com/office/drawing/2014/main" id="{85E385A7-6117-A555-7AEE-AE8C2E067F6C}"/>
+              </a:ext>
+            </a:extLst>
+          </p:cNvPr>
+          <p:cNvSpPr>
+            <a:spLocks noGrp="1"/>
+          </p:cNvSpPr>
+          <p:nvPr>
+            <p:ph sz="half" idx="1"/>
+          </p:nvPr>
+        </p:nvSpPr>
+        <p:spPr/>
+        <p:txBody>
+          <a:bodyPr/>
+          <a:lstStyle/>
+          <a:p>
+            <a:endParaRPr lang="en-US"/>
+          </a:p>
+        </p:txBody>
+      </p:sp>
+      <p:sp>
+        <p:nvSpPr>
+          <p:cNvPr id="5" name="Content Placeholder 4">
+            <a:extLst>
+              <a:ext uri="{FF2B5EF4-FFF2-40B4-BE49-F238E27FC236}">
+                <a16:creationId xmlns:a16="http://schemas.microsoft.com/office/drawing/2014/main" id="{A07789E7-1816-20FC-4D05-C65E06D36955}"/>
+              </a:ext>
+            </a:extLst>
+          </p:cNvPr>
+          <p:cNvSpPr>
+            <a:spLocks noGrp="1"/>
+          </p:cNvSpPr>
+          <p:nvPr>
+            <p:ph sz="half" idx="2"/>
+          </p:nvPr>
+        </p:nvSpPr>
+        <p:spPr/>
+        <p:txBody>
+          <a:bodyPr/>
+          <a:lstStyle/>
+          <a:p>
+            <a:r>
+              <a:rPr lang="en-US" dirty="0"/>
+              <a:t>Investigated Mortgage Approval Rates</a:t>
+            </a:r>
+          </a:p>
+          <a:p>
+            <a:r>
+              <a:rPr lang="en-US" dirty="0"/>
+              <a:t>Evaluated Potential Proxy Variables</a:t>
+            </a:r>
+          </a:p>
+        </p:txBody>
+      </p:sp>
+    </p:spTree>
+    <p:extLst>
+      <p:ext uri="{BB962C8B-B14F-4D97-AF65-F5344CB8AC3E}">
+        <p14:creationId xmlns:p14="http://schemas.microsoft.com/office/powerpoint/2010/main" val="258861451"/>
+      </p:ext>
+    </p:extLst>
+  </p:cSld>
+  <p:clrMapOvr>
+    <a:masterClrMapping/>
+  </p:clrMapOvr>
+</p:sld>
+</file>
+
+<file path=ppt/slides/slide5.xml><?xml version="1.0" encoding="utf-8"?>
+<p:sld xmlns:a="http://schemas.openxmlformats.org/drawingml/2006/main" xmlns:r="http://schemas.openxmlformats.org/officeDocument/2006/relationships" xmlns:p="http://schemas.openxmlformats.org/presentationml/2006/main">
+  <p:cSld>
+    <p:spTree>
+      <p:nvGrpSpPr>
+        <p:cNvPr id="1" name="">
+          <a:extLst>
+            <a:ext uri="{FF2B5EF4-FFF2-40B4-BE49-F238E27FC236}">
+              <a16:creationId xmlns:a16="http://schemas.microsoft.com/office/drawing/2014/main" id="{5FA1FDD7-5131-1871-A136-75A2200AA6CC}"/>
+            </a:ext>
+          </a:extLst>
+        </p:cNvPr>
+        <p:cNvGrpSpPr/>
+        <p:nvPr/>
+      </p:nvGrpSpPr>
+      <p:grpSpPr>
+        <a:xfrm>
+          <a:off x="0" y="0"/>
+          <a:ext cx="0" cy="0"/>
+          <a:chOff x="0" y="0"/>
+          <a:chExt cx="0" cy="0"/>
+        </a:xfrm>
+      </p:grpSpPr>
+      <p:sp>
+        <p:nvSpPr>
+          <p:cNvPr id="2" name="Title 1">
+            <a:extLst>
+              <a:ext uri="{FF2B5EF4-FFF2-40B4-BE49-F238E27FC236}">
+                <a16:creationId xmlns:a16="http://schemas.microsoft.com/office/drawing/2014/main" id="{820F5F64-4503-8062-7AB8-1B2A17A0300B}"/>
+              </a:ext>
+            </a:extLst>
+          </p:cNvPr>
+          <p:cNvSpPr>
+            <a:spLocks noGrp="1"/>
+          </p:cNvSpPr>
+          <p:nvPr>
+            <p:ph type="title"/>
+          </p:nvPr>
+        </p:nvSpPr>
+        <p:spPr/>
+        <p:txBody>
+          <a:bodyPr/>
+          <a:lstStyle/>
+          <a:p>
+            <a:r>
+              <a:rPr lang="en-US" dirty="0"/>
+              <a:t>Proposed Mitigation</a:t>
+            </a:r>
+          </a:p>
+        </p:txBody>
+      </p:sp>
+      <p:sp>
+        <p:nvSpPr>
+          <p:cNvPr id="3" name="Content Placeholder 2">
+            <a:extLst>
+              <a:ext uri="{FF2B5EF4-FFF2-40B4-BE49-F238E27FC236}">
+                <a16:creationId xmlns:a16="http://schemas.microsoft.com/office/drawing/2014/main" id="{688850C6-AED7-7F10-EAE2-59FD75120DAE}"/>
+              </a:ext>
+            </a:extLst>
+          </p:cNvPr>
+          <p:cNvSpPr>
+            <a:spLocks noGrp="1"/>
+          </p:cNvSpPr>
+          <p:nvPr>
+            <p:ph idx="1"/>
+          </p:nvPr>
+        </p:nvSpPr>
+        <p:spPr/>
+        <p:txBody>
+          <a:bodyPr/>
+          <a:lstStyle/>
+          <a:p>
+            <a:endParaRPr lang="en-US"/>
+          </a:p>
+        </p:txBody>
+      </p:sp>
+    </p:spTree>
+    <p:extLst>
+      <p:ext uri="{BB962C8B-B14F-4D97-AF65-F5344CB8AC3E}">
+        <p14:creationId xmlns:p14="http://schemas.microsoft.com/office/powerpoint/2010/main" val="3907948672"/>
+      </p:ext>
+    </p:extLst>
+  </p:cSld>
+  <p:clrMapOvr>
+    <a:masterClrMapping/>
+  </p:clrMapOvr>
+</p:sld>
+</file>
+
+<file path=ppt/slides/slide6.xml><?xml version="1.0" encoding="utf-8"?>
+<p:sld xmlns:a="http://schemas.openxmlformats.org/drawingml/2006/main" xmlns:r="http://schemas.openxmlformats.org/officeDocument/2006/relationships" xmlns:p="http://schemas.openxmlformats.org/presentationml/2006/main">
+  <p:cSld>
+    <p:spTree>
+      <p:nvGrpSpPr>
+        <p:cNvPr id="1" name=""/>
+        <p:cNvGrpSpPr/>
+        <p:nvPr/>
+      </p:nvGrpSpPr>
+      <p:grpSpPr>
+        <a:xfrm>
+          <a:off x="0" y="0"/>
+          <a:ext cx="0" cy="0"/>
+          <a:chOff x="0" y="0"/>
+          <a:chExt cx="0" cy="0"/>
+        </a:xfrm>
+      </p:grpSpPr>
+      <p:sp>
+        <p:nvSpPr>
+          <p:cNvPr id="2" name="Title 1">
+            <a:extLst>
+              <a:ext uri="{FF2B5EF4-FFF2-40B4-BE49-F238E27FC236}">
                 <a16:creationId xmlns:a16="http://schemas.microsoft.com/office/drawing/2014/main" id="{D37960FF-2141-5FF8-219F-0EA6D7FF195D}"/>
               </a:ext>
             </a:extLst>
